--- a/miniLISA - Copy.pptx
+++ b/miniLISA - Copy.pptx
@@ -4019,6 +4019,122 @@
               <a:t>2</a:t>
             </a:fld>
             <a:endParaRPr lang="et-EE" dirty="0"/>
+          </a:p>
+        </p:txBody>
+      </p:sp>
+      <p:sp>
+        <p:nvSpPr>
+          <p:cNvPr id="3" name="TextBox 2">
+            <a:extLst>
+              <a:ext uri="{FF2B5EF4-FFF2-40B4-BE49-F238E27FC236}">
+                <a16:creationId xmlns:a16="http://schemas.microsoft.com/office/drawing/2014/main" id="{E4163CBE-F93A-46EE-96CE-C31B121ED34D}"/>
+              </a:ext>
+            </a:extLst>
+          </p:cNvPr>
+          <p:cNvSpPr txBox="1"/>
+          <p:nvPr/>
+        </p:nvSpPr>
+        <p:spPr>
+          <a:xfrm>
+            <a:off x="8607188" y="1637731"/>
+            <a:ext cx="2925170" cy="1384995"/>
+          </a:xfrm>
+          <a:prstGeom prst="rect">
+            <a:avLst/>
+          </a:prstGeom>
+          <a:noFill/>
+        </p:spPr>
+        <p:txBody>
+          <a:bodyPr wrap="square" rtlCol="0">
+            <a:spAutoFit/>
+          </a:bodyPr>
+          <a:lstStyle/>
+          <a:p>
+            <a:pPr marL="285750" indent="-285750" algn="l">
+              <a:buFont typeface="Arial" panose="020B0604020202020204" pitchFamily="34" charset="0"/>
+              <a:buChar char="•"/>
+            </a:pPr>
+            <a:r>
+              <a:rPr lang="en-US" sz="1400" dirty="0">
+                <a:solidFill>
+                  <a:srgbClr val="667982"/>
+                </a:solidFill>
+                <a:latin typeface="Arial" panose="020B0604020202020204" pitchFamily="34" charset="0"/>
+                <a:cs typeface="Arial" panose="020B0604020202020204" pitchFamily="34" charset="0"/>
+              </a:rPr>
+              <a:t>Backlink noise  = 0</a:t>
+            </a:r>
+          </a:p>
+          <a:p>
+            <a:pPr marL="285750" indent="-285750" algn="l">
+              <a:buFont typeface="Arial" panose="020B0604020202020204" pitchFamily="34" charset="0"/>
+              <a:buChar char="•"/>
+            </a:pPr>
+            <a:r>
+              <a:rPr lang="en-US" sz="1400" dirty="0">
+                <a:solidFill>
+                  <a:srgbClr val="667982"/>
+                </a:solidFill>
+                <a:latin typeface="Arial" panose="020B0604020202020204" pitchFamily="34" charset="0"/>
+                <a:cs typeface="Arial" panose="020B0604020202020204" pitchFamily="34" charset="0"/>
+              </a:rPr>
+              <a:t>Laser frequency offset for two lasers on one SC = 0</a:t>
+            </a:r>
+          </a:p>
+          <a:p>
+            <a:pPr marL="285750" indent="-285750" algn="l">
+              <a:buFont typeface="Arial" panose="020B0604020202020204" pitchFamily="34" charset="0"/>
+              <a:buChar char="•"/>
+            </a:pPr>
+            <a:r>
+              <a:rPr lang="en-US" sz="1400" dirty="0">
+                <a:solidFill>
+                  <a:srgbClr val="667982"/>
+                </a:solidFill>
+                <a:latin typeface="Arial" panose="020B0604020202020204" pitchFamily="34" charset="0"/>
+                <a:cs typeface="Arial" panose="020B0604020202020204" pitchFamily="34" charset="0"/>
+              </a:rPr>
+              <a:t>And their noise is the same</a:t>
+            </a:r>
+          </a:p>
+          <a:p>
+            <a:pPr marL="285750" indent="-285750" algn="l">
+              <a:buFont typeface="Arial" panose="020B0604020202020204" pitchFamily="34" charset="0"/>
+              <a:buChar char="•"/>
+            </a:pPr>
+            <a:r>
+              <a:rPr lang="en-US" sz="1400" dirty="0">
+                <a:solidFill>
+                  <a:srgbClr val="667982"/>
+                </a:solidFill>
+                <a:latin typeface="Arial" panose="020B0604020202020204" pitchFamily="34" charset="0"/>
+                <a:cs typeface="Arial" panose="020B0604020202020204" pitchFamily="34" charset="0"/>
+              </a:rPr>
+              <a:t>No optical bench noise</a:t>
+            </a:r>
+          </a:p>
+          <a:p>
+            <a:pPr marL="285750" indent="-285750" algn="l">
+              <a:buFont typeface="Arial" panose="020B0604020202020204" pitchFamily="34" charset="0"/>
+              <a:buChar char="•"/>
+            </a:pPr>
+            <a:r>
+              <a:rPr lang="en-US" sz="1400">
+                <a:solidFill>
+                  <a:srgbClr val="667982"/>
+                </a:solidFill>
+                <a:latin typeface="Arial" panose="020B0604020202020204" pitchFamily="34" charset="0"/>
+                <a:cs typeface="Arial" panose="020B0604020202020204" pitchFamily="34" charset="0"/>
+              </a:rPr>
+              <a:t>No acceleration noise</a:t>
+            </a:r>
+            <a:endParaRPr lang="LID4096" sz="1400" dirty="0">
+              <a:solidFill>
+                <a:srgbClr val="667982"/>
+              </a:solidFill>
+              <a:latin typeface="Arial" panose="020B0604020202020204" pitchFamily="34" charset="0"/>
+              <a:cs typeface="Arial" panose="020B0604020202020204" pitchFamily="34" charset="0"/>
+            </a:endParaRPr>
           </a:p>
         </p:txBody>
       </p:sp>
